--- a/assets/pptx/catalog-584.pptx
+++ b/assets/pptx/catalog-584.pptx
@@ -3387,7 +3387,7 @@
                 <a:ea typeface="Ebrima"/>
                 <a:cs typeface="Ebrima"/>
               </a:rPr>
-              <a:t>እስቲ በእግዚአብሔር ታመኚ (2x)</a:t>
+              <a:t>እስቲ በእግዚአብሔር ታመኚ 2x</a:t>
             </a:r>
           </a:p>
         </p:txBody>
@@ -3508,7 +3508,7 @@
                 <a:ea typeface="Ebrima"/>
                 <a:cs typeface="Ebrima"/>
               </a:rPr>
-              <a:t>እንዴት እንዴት አርጐስ ታደገሽ (2x)</a:t>
+              <a:t>እንዴት እንዴት አርጐስ ታደገሽ 2x</a:t>
             </a:r>
           </a:p>
         </p:txBody>
@@ -3593,7 +3593,7 @@
                 <a:ea typeface="Ebrima"/>
                 <a:cs typeface="Ebrima"/>
               </a:rPr>
-              <a:t>እስቲ በእግዚአብሔር ታመኚ (2x)</a:t>
+              <a:t>እስቲ በእግዚአብሔር ታመኚ 2x</a:t>
             </a:r>
           </a:p>
         </p:txBody>
@@ -3799,7 +3799,7 @@
                 <a:ea typeface="Ebrima"/>
                 <a:cs typeface="Ebrima"/>
               </a:rPr>
-              <a:t>አንተን ደስ ካለህ ካልተቆጣኸኝ (2x)</a:t>
+              <a:t>አንተን ደስ ካለህ ካልተቆጣኸኝ 2x</a:t>
             </a:r>
           </a:p>
           <a:p>
@@ -3835,7 +3835,7 @@
                 <a:ea typeface="Ebrima"/>
                 <a:cs typeface="Ebrima"/>
               </a:rPr>
-              <a:t>ይሄ ይበቃኛል እረካለሁኝ (2x)</a:t>
+              <a:t>ይሄ ይበቃኛል እረካለሁኝ 2x</a:t>
             </a:r>
           </a:p>
         </p:txBody>
@@ -4095,7 +4095,7 @@
                 <a:ea typeface="Ebrima"/>
                 <a:cs typeface="Ebrima"/>
               </a:rPr>
-              <a:t>ፍቅርህን ብቻ ነው (2x)</a:t>
+              <a:t>ፍቅርህን ብቻ ነው 2x</a:t>
             </a:r>
           </a:p>
           <a:p>
